--- a/m7/diapositivos/sessao-01-m7-f01.pptx
+++ b/m7/diapositivos/sessao-01-m7-f01.pptx
@@ -4204,13 +4204,10 @@
               <a:lnSpc>
                 <a:spcPct val="120000"/>
               </a:lnSpc>
-              <a:spcAft>
-                <a:spcPts val="1000"/>
-              </a:spcAft>
-              <a:buNone/>
-            </a:pPr>
-            <a:r>
-              <a:rPr lang="en-US" sz="2300" dirty="0">
+              <a:buNone/>
+            </a:pPr>
+            <a:r>
+              <a:rPr lang="en-US" sz="2300" b="1" dirty="0">
                 <a:solidFill>
                   <a:srgbClr val="F2F0EA"/>
                 </a:solidFill>
@@ -4218,18 +4215,12 @@
                 <a:ea typeface="Georgia" pitchFamily="34" charset="-122"/>
                 <a:cs typeface="Georgia" pitchFamily="34" charset="-120"/>
               </a:rPr>
-              <a:t>Ortónimo: Fernando Pessoa quando assina com o próprio nome.</a:t>
-            </a:r>
-            <a:endParaRPr lang="en-US" sz="2300" dirty="0"/>
-          </a:p>
-          <a:p>
+              <a:t>Ortónimo</a:t>
+            </a:r>
             <a:pPr indent="0" marL="0">
               <a:lnSpc>
                 <a:spcPct val="120000"/>
               </a:lnSpc>
-              <a:spcAft>
-                <a:spcPts val="1000"/>
-              </a:spcAft>
               <a:buNone/>
             </a:pPr>
             <a:r>
@@ -4241,7 +4232,41 @@
                 <a:ea typeface="Georgia" pitchFamily="34" charset="-122"/>
                 <a:cs typeface="Georgia" pitchFamily="34" charset="-120"/>
               </a:rPr>
-              <a:t>Heterónimo: um poeta que Pessoa inventou, com nome, vida e estilo próprios, diferente do dele. Os três mais conhecidos são Alberto Caeiro, Ricardo Reis e Álvaro de Campos.</a:t>
+              <a:t>: Fernando Pessoa quando assina com o próprio nome. </a:t>
+            </a:r>
+            <a:pPr indent="0" marL="0">
+              <a:lnSpc>
+                <a:spcPct val="120000"/>
+              </a:lnSpc>
+              <a:buNone/>
+            </a:pPr>
+            <a:r>
+              <a:rPr lang="en-US" sz="2300" b="1" dirty="0">
+                <a:solidFill>
+                  <a:srgbClr val="F2F0EA"/>
+                </a:solidFill>
+                <a:latin typeface="Georgia" pitchFamily="34" charset="0"/>
+                <a:ea typeface="Georgia" pitchFamily="34" charset="-122"/>
+                <a:cs typeface="Georgia" pitchFamily="34" charset="-120"/>
+              </a:rPr>
+              <a:t>Heterónimo</a:t>
+            </a:r>
+            <a:pPr indent="0" marL="0">
+              <a:lnSpc>
+                <a:spcPct val="120000"/>
+              </a:lnSpc>
+              <a:buNone/>
+            </a:pPr>
+            <a:r>
+              <a:rPr lang="en-US" sz="2300" dirty="0">
+                <a:solidFill>
+                  <a:srgbClr val="F2F0EA"/>
+                </a:solidFill>
+                <a:latin typeface="Georgia" pitchFamily="34" charset="0"/>
+                <a:ea typeface="Georgia" pitchFamily="34" charset="-122"/>
+                <a:cs typeface="Georgia" pitchFamily="34" charset="-120"/>
+              </a:rPr>
+              <a:t>: um poeta que Pessoa inventou, com nome, vida e estilo próprios, diferente do dele. Os três mais conhecidos são Alberto Caeiro, Ricardo Reis e Álvaro de Campos.</a:t>
             </a:r>
             <a:endParaRPr lang="en-US" sz="2300" dirty="0"/>
           </a:p>
@@ -6292,11 +6317,8 @@
                 <a:ea typeface="Georgia" pitchFamily="34" charset="-122"/>
                 <a:cs typeface="Georgia" pitchFamily="34" charset="-120"/>
               </a:rPr>
-              <a:t>Numa carta a Adolfo Casais Monteiro (13 de janeiro de 1935), Pessoa explica a origem dos heterónimos: diz que lhes construiu «as idades e as vidas». Alberto Caeiro nasceu em Lisboa em 1889 e morreu em 1915; viveu quase sempre no campo, sem profissão e quase sem educação. Ricardo Reis nasceu no Porto em 1887, é médico, latinista por educação, e vive no Brasil desde 1919, por ser monárquico. Álvaro de Campos nasceu em Tavira a 15 de outubro de 1890; fez o liceu e foi estudar engenharia para a Escócia: é engenheiro naval, formado em Glasgow.</a:t>
-            </a:r>
-            <a:endParaRPr lang="en-US" sz="2000" dirty="0"/>
-          </a:p>
-          <a:p>
+              <a:t>Numa carta a Adolfo Casais Monteiro (13 de janeiro de 1935), Pessoa explica a origem dos heterónimos: diz que lhes construiu «as idades e as vidas». </a:t>
+            </a:r>
             <a:pPr indent="0" marL="0">
               <a:lnSpc>
                 <a:spcPct val="120000"/>
@@ -6307,7 +6329,7 @@
               <a:buNone/>
             </a:pPr>
             <a:r>
-              <a:rPr lang="en-US" sz="2000" dirty="0">
+              <a:rPr lang="en-US" sz="2000" b="1" dirty="0">
                 <a:solidFill>
                   <a:srgbClr val="F2F0EA"/>
                 </a:solidFill>
@@ -6315,7 +6337,170 @@
                 <a:ea typeface="Georgia" pitchFamily="34" charset="-122"/>
                 <a:cs typeface="Georgia" pitchFamily="34" charset="-120"/>
               </a:rPr>
-              <a:t>O «dia triunfal» foi a 8 de março de 1914: Pessoa conta que escreveu «trinta e tantos poemas a fio», a começar pelo título O Guardador de Rebanhos.</a:t>
+              <a:t>Alberto Caeiro</a:t>
+            </a:r>
+            <a:pPr indent="0" marL="0">
+              <a:lnSpc>
+                <a:spcPct val="120000"/>
+              </a:lnSpc>
+              <a:spcAft>
+                <a:spcPts val="1000"/>
+              </a:spcAft>
+              <a:buNone/>
+            </a:pPr>
+            <a:r>
+              <a:rPr lang="en-US" sz="2000" dirty="0">
+                <a:solidFill>
+                  <a:srgbClr val="F2F0EA"/>
+                </a:solidFill>
+                <a:latin typeface="Georgia" pitchFamily="34" charset="0"/>
+                <a:ea typeface="Georgia" pitchFamily="34" charset="-122"/>
+                <a:cs typeface="Georgia" pitchFamily="34" charset="-120"/>
+              </a:rPr>
+              <a:t> nasceu em Lisboa em 1889 e morreu em 1915; viveu quase sempre no campo, sem profissão e quase sem educação. </a:t>
+            </a:r>
+            <a:pPr indent="0" marL="0">
+              <a:lnSpc>
+                <a:spcPct val="120000"/>
+              </a:lnSpc>
+              <a:spcAft>
+                <a:spcPts val="1000"/>
+              </a:spcAft>
+              <a:buNone/>
+            </a:pPr>
+            <a:r>
+              <a:rPr lang="en-US" sz="2000" b="1" dirty="0">
+                <a:solidFill>
+                  <a:srgbClr val="F2F0EA"/>
+                </a:solidFill>
+                <a:latin typeface="Georgia" pitchFamily="34" charset="0"/>
+                <a:ea typeface="Georgia" pitchFamily="34" charset="-122"/>
+                <a:cs typeface="Georgia" pitchFamily="34" charset="-120"/>
+              </a:rPr>
+              <a:t>Ricardo Reis</a:t>
+            </a:r>
+            <a:pPr indent="0" marL="0">
+              <a:lnSpc>
+                <a:spcPct val="120000"/>
+              </a:lnSpc>
+              <a:spcAft>
+                <a:spcPts val="1000"/>
+              </a:spcAft>
+              <a:buNone/>
+            </a:pPr>
+            <a:r>
+              <a:rPr lang="en-US" sz="2000" dirty="0">
+                <a:solidFill>
+                  <a:srgbClr val="F2F0EA"/>
+                </a:solidFill>
+                <a:latin typeface="Georgia" pitchFamily="34" charset="0"/>
+                <a:ea typeface="Georgia" pitchFamily="34" charset="-122"/>
+                <a:cs typeface="Georgia" pitchFamily="34" charset="-120"/>
+              </a:rPr>
+              <a:t> nasceu no Porto em 1887, é médico, latinista por educação, e vive no Brasil desde 1919, por ser monárquico. </a:t>
+            </a:r>
+            <a:pPr indent="0" marL="0">
+              <a:lnSpc>
+                <a:spcPct val="120000"/>
+              </a:lnSpc>
+              <a:spcAft>
+                <a:spcPts val="1000"/>
+              </a:spcAft>
+              <a:buNone/>
+            </a:pPr>
+            <a:r>
+              <a:rPr lang="en-US" sz="2000" b="1" dirty="0">
+                <a:solidFill>
+                  <a:srgbClr val="F2F0EA"/>
+                </a:solidFill>
+                <a:latin typeface="Georgia" pitchFamily="34" charset="0"/>
+                <a:ea typeface="Georgia" pitchFamily="34" charset="-122"/>
+                <a:cs typeface="Georgia" pitchFamily="34" charset="-120"/>
+              </a:rPr>
+              <a:t>Álvaro de Campos</a:t>
+            </a:r>
+            <a:pPr indent="0" marL="0">
+              <a:lnSpc>
+                <a:spcPct val="120000"/>
+              </a:lnSpc>
+              <a:spcAft>
+                <a:spcPts val="1000"/>
+              </a:spcAft>
+              <a:buNone/>
+            </a:pPr>
+            <a:r>
+              <a:rPr lang="en-US" sz="2000" dirty="0">
+                <a:solidFill>
+                  <a:srgbClr val="F2F0EA"/>
+                </a:solidFill>
+                <a:latin typeface="Georgia" pitchFamily="34" charset="0"/>
+                <a:ea typeface="Georgia" pitchFamily="34" charset="-122"/>
+                <a:cs typeface="Georgia" pitchFamily="34" charset="-120"/>
+              </a:rPr>
+              <a:t> nasceu em Tavira a 15 de outubro de 1890; fez o liceu e foi estudar engenharia para a Escócia: é engenheiro naval, formado em Glasgow.</a:t>
+            </a:r>
+            <a:endParaRPr lang="en-US" sz="2000" dirty="0"/>
+          </a:p>
+          <a:p>
+            <a:pPr indent="0" marL="0">
+              <a:lnSpc>
+                <a:spcPct val="120000"/>
+              </a:lnSpc>
+              <a:spcAft>
+                <a:spcPts val="1000"/>
+              </a:spcAft>
+              <a:buNone/>
+            </a:pPr>
+            <a:r>
+              <a:rPr lang="en-US" sz="2000" dirty="0">
+                <a:solidFill>
+                  <a:srgbClr val="F2F0EA"/>
+                </a:solidFill>
+                <a:latin typeface="Georgia" pitchFamily="34" charset="0"/>
+                <a:ea typeface="Georgia" pitchFamily="34" charset="-122"/>
+                <a:cs typeface="Georgia" pitchFamily="34" charset="-120"/>
+              </a:rPr>
+              <a:t>O «dia triunfal» foi a 8 de março de 1914: Pessoa conta que escreveu «trinta e tantos poemas a fio», a começar pelo título </a:t>
+            </a:r>
+            <a:pPr indent="0" marL="0">
+              <a:lnSpc>
+                <a:spcPct val="120000"/>
+              </a:lnSpc>
+              <a:spcAft>
+                <a:spcPts val="1000"/>
+              </a:spcAft>
+              <a:buNone/>
+            </a:pPr>
+            <a:r>
+              <a:rPr lang="en-US" sz="2000" i="1" dirty="0">
+                <a:solidFill>
+                  <a:srgbClr val="F2F0EA"/>
+                </a:solidFill>
+                <a:latin typeface="Georgia" pitchFamily="34" charset="0"/>
+                <a:ea typeface="Georgia" pitchFamily="34" charset="-122"/>
+                <a:cs typeface="Georgia" pitchFamily="34" charset="-120"/>
+              </a:rPr>
+              <a:t>O Guardador de Rebanhos</a:t>
+            </a:r>
+            <a:pPr indent="0" marL="0">
+              <a:lnSpc>
+                <a:spcPct val="120000"/>
+              </a:lnSpc>
+              <a:spcAft>
+                <a:spcPts val="1000"/>
+              </a:spcAft>
+              <a:buNone/>
+            </a:pPr>
+            <a:r>
+              <a:rPr lang="en-US" sz="2000" dirty="0">
+                <a:solidFill>
+                  <a:srgbClr val="F2F0EA"/>
+                </a:solidFill>
+                <a:latin typeface="Georgia" pitchFamily="34" charset="0"/>
+                <a:ea typeface="Georgia" pitchFamily="34" charset="-122"/>
+                <a:cs typeface="Georgia" pitchFamily="34" charset="-120"/>
+              </a:rPr>
+              <a:t>.</a:t>
             </a:r>
             <a:endParaRPr lang="en-US" sz="2000" dirty="0"/>
           </a:p>
